--- a/Week-2/Day-2/GCP_Modules_1_2_Foundations_Storage.pptx
+++ b/Week-2/Day-2/GCP_Modules_1_2_Foundations_Storage.pptx
@@ -8,30 +8,33 @@
     <p:sldId id="256" r:id="rId2"/>
     <p:sldId id="257" r:id="rId3"/>
     <p:sldId id="258" r:id="rId4"/>
-    <p:sldId id="259" r:id="rId5"/>
-    <p:sldId id="260" r:id="rId6"/>
-    <p:sldId id="261" r:id="rId7"/>
-    <p:sldId id="262" r:id="rId8"/>
-    <p:sldId id="263" r:id="rId9"/>
-    <p:sldId id="264" r:id="rId10"/>
-    <p:sldId id="265" r:id="rId11"/>
-    <p:sldId id="266" r:id="rId12"/>
-    <p:sldId id="267" r:id="rId13"/>
-    <p:sldId id="268" r:id="rId14"/>
-    <p:sldId id="269" r:id="rId15"/>
-    <p:sldId id="270" r:id="rId16"/>
-    <p:sldId id="271" r:id="rId17"/>
-    <p:sldId id="272" r:id="rId18"/>
-    <p:sldId id="273" r:id="rId19"/>
-    <p:sldId id="274" r:id="rId20"/>
-    <p:sldId id="275" r:id="rId21"/>
-    <p:sldId id="276" r:id="rId22"/>
-    <p:sldId id="277" r:id="rId23"/>
-    <p:sldId id="278" r:id="rId24"/>
-    <p:sldId id="279" r:id="rId25"/>
-    <p:sldId id="280" r:id="rId26"/>
-    <p:sldId id="281" r:id="rId27"/>
-    <p:sldId id="282" r:id="rId28"/>
+    <p:sldId id="283" r:id="rId5"/>
+    <p:sldId id="284" r:id="rId6"/>
+    <p:sldId id="259" r:id="rId7"/>
+    <p:sldId id="260" r:id="rId8"/>
+    <p:sldId id="261" r:id="rId9"/>
+    <p:sldId id="262" r:id="rId10"/>
+    <p:sldId id="263" r:id="rId11"/>
+    <p:sldId id="285" r:id="rId12"/>
+    <p:sldId id="264" r:id="rId13"/>
+    <p:sldId id="265" r:id="rId14"/>
+    <p:sldId id="266" r:id="rId15"/>
+    <p:sldId id="267" r:id="rId16"/>
+    <p:sldId id="268" r:id="rId17"/>
+    <p:sldId id="269" r:id="rId18"/>
+    <p:sldId id="270" r:id="rId19"/>
+    <p:sldId id="271" r:id="rId20"/>
+    <p:sldId id="272" r:id="rId21"/>
+    <p:sldId id="273" r:id="rId22"/>
+    <p:sldId id="274" r:id="rId23"/>
+    <p:sldId id="275" r:id="rId24"/>
+    <p:sldId id="276" r:id="rId25"/>
+    <p:sldId id="277" r:id="rId26"/>
+    <p:sldId id="278" r:id="rId27"/>
+    <p:sldId id="279" r:id="rId28"/>
+    <p:sldId id="280" r:id="rId29"/>
+    <p:sldId id="281" r:id="rId30"/>
+    <p:sldId id="282" r:id="rId31"/>
   </p:sldIdLst>
   <p:sldSz cx="9144000" cy="6858000" type="screen4x3"/>
   <p:notesSz cx="6858000" cy="9144000"/>
@@ -10067,7 +10070,7 @@
           <a:p>
             <a:fld id="{5BCAD085-E8A6-8845-BD4E-CB4CCA059FC4}" type="datetimeFigureOut">
               <a:rPr lang="en-US" smtClean="0"/>
-              <a:t>4/5/2026</a:t>
+              <a:t>4/7/2026</a:t>
             </a:fld>
             <a:endParaRPr lang="en-US"/>
           </a:p>
@@ -10274,7 +10277,7 @@
           <a:p>
             <a:fld id="{5BCAD085-E8A6-8845-BD4E-CB4CCA059FC4}" type="datetimeFigureOut">
               <a:rPr lang="en-US" smtClean="0"/>
-              <a:t>4/5/2026</a:t>
+              <a:t>4/7/2026</a:t>
             </a:fld>
             <a:endParaRPr lang="en-US"/>
           </a:p>
@@ -10454,7 +10457,7 @@
           <a:p>
             <a:fld id="{5BCAD085-E8A6-8845-BD4E-CB4CCA059FC4}" type="datetimeFigureOut">
               <a:rPr lang="en-US" smtClean="0"/>
-              <a:t>4/5/2026</a:t>
+              <a:t>4/7/2026</a:t>
             </a:fld>
             <a:endParaRPr lang="en-US"/>
           </a:p>
@@ -10659,7 +10662,7 @@
           <a:p>
             <a:fld id="{5BCAD085-E8A6-8845-BD4E-CB4CCA059FC4}" type="datetimeFigureOut">
               <a:rPr lang="en-US" smtClean="0"/>
-              <a:t>4/5/2026</a:t>
+              <a:t>4/7/2026</a:t>
             </a:fld>
             <a:endParaRPr lang="en-US"/>
           </a:p>
@@ -17397,7 +17400,7 @@
           <a:p>
             <a:fld id="{5BCAD085-E8A6-8845-BD4E-CB4CCA059FC4}" type="datetimeFigureOut">
               <a:rPr lang="en-US" smtClean="0"/>
-              <a:t>4/5/2026</a:t>
+              <a:t>4/7/2026</a:t>
             </a:fld>
             <a:endParaRPr lang="en-US"/>
           </a:p>
@@ -17671,7 +17674,7 @@
           <a:p>
             <a:fld id="{5BCAD085-E8A6-8845-BD4E-CB4CCA059FC4}" type="datetimeFigureOut">
               <a:rPr lang="en-US" smtClean="0"/>
-              <a:t>4/5/2026</a:t>
+              <a:t>4/7/2026</a:t>
             </a:fld>
             <a:endParaRPr lang="en-US"/>
           </a:p>
@@ -18074,7 +18077,7 @@
           <a:p>
             <a:fld id="{5BCAD085-E8A6-8845-BD4E-CB4CCA059FC4}" type="datetimeFigureOut">
               <a:rPr lang="en-US" smtClean="0"/>
-              <a:t>4/5/2026</a:t>
+              <a:t>4/7/2026</a:t>
             </a:fld>
             <a:endParaRPr lang="en-US"/>
           </a:p>
@@ -18192,7 +18195,7 @@
           <a:p>
             <a:fld id="{5BCAD085-E8A6-8845-BD4E-CB4CCA059FC4}" type="datetimeFigureOut">
               <a:rPr lang="en-US" smtClean="0"/>
-              <a:t>4/5/2026</a:t>
+              <a:t>4/7/2026</a:t>
             </a:fld>
             <a:endParaRPr lang="en-US"/>
           </a:p>
@@ -18287,7 +18290,7 @@
           <a:p>
             <a:fld id="{5BCAD085-E8A6-8845-BD4E-CB4CCA059FC4}" type="datetimeFigureOut">
               <a:rPr lang="en-US" smtClean="0"/>
-              <a:t>4/5/2026</a:t>
+              <a:t>4/7/2026</a:t>
             </a:fld>
             <a:endParaRPr lang="en-US"/>
           </a:p>
@@ -18579,7 +18582,7 @@
           <a:p>
             <a:fld id="{5BCAD085-E8A6-8845-BD4E-CB4CCA059FC4}" type="datetimeFigureOut">
               <a:rPr lang="en-US" smtClean="0"/>
-              <a:t>4/5/2026</a:t>
+              <a:t>4/7/2026</a:t>
             </a:fld>
             <a:endParaRPr lang="en-US"/>
           </a:p>
@@ -18859,7 +18862,7 @@
           <a:p>
             <a:fld id="{5BCAD085-E8A6-8845-BD4E-CB4CCA059FC4}" type="datetimeFigureOut">
               <a:rPr lang="en-US" smtClean="0"/>
-              <a:t>4/5/2026</a:t>
+              <a:t>4/7/2026</a:t>
             </a:fld>
             <a:endParaRPr lang="en-US"/>
           </a:p>
@@ -19109,7 +19112,7 @@
           <a:p>
             <a:fld id="{5BCAD085-E8A6-8845-BD4E-CB4CCA059FC4}" type="datetimeFigureOut">
               <a:rPr lang="en-US" smtClean="0"/>
-              <a:t>4/5/2026</a:t>
+              <a:t>4/7/2026</a:t>
             </a:fld>
             <a:endParaRPr lang="en-US"/>
           </a:p>
@@ -28818,6 +28821,244 @@
           <a:lstStyle/>
           <a:p>
             <a:r>
+              <a:t>IAM Hierarchy</a:t>
+            </a:r>
+          </a:p>
+        </p:txBody>
+      </p:sp>
+      <p:sp>
+        <p:nvSpPr>
+          <p:cNvPr id="3" name="Content Placeholder 2"/>
+          <p:cNvSpPr>
+            <a:spLocks noGrp="1"/>
+          </p:cNvSpPr>
+          <p:nvPr>
+            <p:ph idx="1"/>
+          </p:nvPr>
+        </p:nvSpPr>
+        <p:spPr/>
+        <p:txBody>
+          <a:bodyPr/>
+          <a:lstStyle/>
+          <a:p>
+            <a:r>
+              <a:t>- Organization level</a:t>
+            </a:r>
+          </a:p>
+          <a:p>
+            <a:r>
+              <a:t>- Folder level</a:t>
+            </a:r>
+          </a:p>
+          <a:p>
+            <a:r>
+              <a:t>- Project level</a:t>
+            </a:r>
+          </a:p>
+          <a:p>
+            <a:r>
+              <a:t>- Inheritance of permissions</a:t>
+            </a:r>
+          </a:p>
+        </p:txBody>
+      </p:sp>
+    </p:spTree>
+  </p:cSld>
+  <p:clrMapOvr>
+    <a:masterClrMapping/>
+  </p:clrMapOvr>
+</p:sld>
+</file>
+
+<file path=ppt/slides/slide11.xml><?xml version="1.0" encoding="utf-8"?>
+<p:sld xmlns:a="http://schemas.openxmlformats.org/drawingml/2006/main" xmlns:r="http://schemas.openxmlformats.org/officeDocument/2006/relationships" xmlns:p="http://schemas.openxmlformats.org/presentationml/2006/main">
+  <p:cSld>
+    <p:spTree>
+      <p:nvGrpSpPr>
+        <p:cNvPr id="1" name=""/>
+        <p:cNvGrpSpPr/>
+        <p:nvPr/>
+      </p:nvGrpSpPr>
+      <p:grpSpPr>
+        <a:xfrm>
+          <a:off x="0" y="0"/>
+          <a:ext cx="0" cy="0"/>
+          <a:chOff x="0" y="0"/>
+          <a:chExt cx="0" cy="0"/>
+        </a:xfrm>
+      </p:grpSpPr>
+      <p:pic>
+        <p:nvPicPr>
+          <p:cNvPr id="1026" name="Picture 2" descr="Getting to know Cloud IAM | Google Cloud Blog">
+            <a:extLst>
+              <a:ext uri="{FF2B5EF4-FFF2-40B4-BE49-F238E27FC236}">
+                <a16:creationId xmlns:a16="http://schemas.microsoft.com/office/drawing/2014/main" id="{28FA4BCA-EBC7-2758-E2DC-4808B458D03F}"/>
+              </a:ext>
+            </a:extLst>
+          </p:cNvPr>
+          <p:cNvPicPr>
+            <a:picLocks noGrp="1" noChangeAspect="1" noChangeArrowheads="1"/>
+          </p:cNvPicPr>
+          <p:nvPr>
+            <p:ph idx="1"/>
+          </p:nvPr>
+        </p:nvPicPr>
+        <p:blipFill>
+          <a:blip r:embed="rId2">
+            <a:extLst>
+              <a:ext uri="{28A0092B-C50C-407E-A947-70E740481C1C}">
+                <a14:useLocalDpi xmlns:a14="http://schemas.microsoft.com/office/drawing/2010/main" val="0"/>
+              </a:ext>
+            </a:extLst>
+          </a:blip>
+          <a:srcRect/>
+          <a:stretch>
+            <a:fillRect/>
+          </a:stretch>
+        </p:blipFill>
+        <p:spPr bwMode="auto">
+          <a:xfrm>
+            <a:off x="895351" y="866776"/>
+            <a:ext cx="7858124" cy="5441950"/>
+          </a:xfrm>
+          <a:prstGeom prst="rect">
+            <a:avLst/>
+          </a:prstGeom>
+          <a:noFill/>
+          <a:extLst>
+            <a:ext uri="{909E8E84-426E-40DD-AFC4-6F175D3DCCD1}">
+              <a14:hiddenFill xmlns:a14="http://schemas.microsoft.com/office/drawing/2010/main">
+                <a:solidFill>
+                  <a:srgbClr val="FFFFFF"/>
+                </a:solidFill>
+              </a14:hiddenFill>
+            </a:ext>
+          </a:extLst>
+        </p:spPr>
+      </p:pic>
+    </p:spTree>
+    <p:extLst>
+      <p:ext uri="{BB962C8B-B14F-4D97-AF65-F5344CB8AC3E}">
+        <p14:creationId xmlns:p14="http://schemas.microsoft.com/office/powerpoint/2010/main" val="1503047919"/>
+      </p:ext>
+    </p:extLst>
+  </p:cSld>
+  <p:clrMapOvr>
+    <a:masterClrMapping/>
+  </p:clrMapOvr>
+</p:sld>
+</file>
+
+<file path=ppt/slides/slide12.xml><?xml version="1.0" encoding="utf-8"?>
+<p:sld xmlns:a="http://schemas.openxmlformats.org/drawingml/2006/main" xmlns:r="http://schemas.openxmlformats.org/officeDocument/2006/relationships" xmlns:p="http://schemas.openxmlformats.org/presentationml/2006/main">
+  <p:cSld>
+    <p:spTree>
+      <p:nvGrpSpPr>
+        <p:cNvPr id="1" name=""/>
+        <p:cNvGrpSpPr/>
+        <p:nvPr/>
+      </p:nvGrpSpPr>
+      <p:grpSpPr>
+        <a:xfrm>
+          <a:off x="0" y="0"/>
+          <a:ext cx="0" cy="0"/>
+          <a:chOff x="0" y="0"/>
+          <a:chExt cx="0" cy="0"/>
+        </a:xfrm>
+      </p:grpSpPr>
+      <p:sp>
+        <p:nvSpPr>
+          <p:cNvPr id="2" name="Title 1"/>
+          <p:cNvSpPr>
+            <a:spLocks noGrp="1"/>
+          </p:cNvSpPr>
+          <p:nvPr>
+            <p:ph type="title"/>
+          </p:nvPr>
+        </p:nvSpPr>
+        <p:spPr/>
+        <p:txBody>
+          <a:bodyPr/>
+          <a:lstStyle/>
+          <a:p>
+            <a:r>
+              <a:t>GCP Resource Hierarchy</a:t>
+            </a:r>
+          </a:p>
+        </p:txBody>
+      </p:sp>
+      <p:sp>
+        <p:nvSpPr>
+          <p:cNvPr id="3" name="Content Placeholder 2"/>
+          <p:cNvSpPr>
+            <a:spLocks noGrp="1"/>
+          </p:cNvSpPr>
+          <p:nvPr>
+            <p:ph idx="1"/>
+          </p:nvPr>
+        </p:nvSpPr>
+        <p:spPr/>
+        <p:txBody>
+          <a:bodyPr/>
+          <a:lstStyle/>
+          <a:p>
+            <a:r>
+              <a:t>- Organization → Folder → Project</a:t>
+            </a:r>
+          </a:p>
+          <a:p>
+            <a:r>
+              <a:t>- Logical grouping</a:t>
+            </a:r>
+          </a:p>
+          <a:p>
+            <a:r>
+              <a:t>- Policy inheritance</a:t>
+            </a:r>
+          </a:p>
+        </p:txBody>
+      </p:sp>
+    </p:spTree>
+  </p:cSld>
+  <p:clrMapOvr>
+    <a:masterClrMapping/>
+  </p:clrMapOvr>
+</p:sld>
+</file>
+
+<file path=ppt/slides/slide13.xml><?xml version="1.0" encoding="utf-8"?>
+<p:sld xmlns:a="http://schemas.openxmlformats.org/drawingml/2006/main" xmlns:r="http://schemas.openxmlformats.org/officeDocument/2006/relationships" xmlns:p="http://schemas.openxmlformats.org/presentationml/2006/main">
+  <p:cSld>
+    <p:spTree>
+      <p:nvGrpSpPr>
+        <p:cNvPr id="1" name=""/>
+        <p:cNvGrpSpPr/>
+        <p:nvPr/>
+      </p:nvGrpSpPr>
+      <p:grpSpPr>
+        <a:xfrm>
+          <a:off x="0" y="0"/>
+          <a:ext cx="0" cy="0"/>
+          <a:chOff x="0" y="0"/>
+          <a:chExt cx="0" cy="0"/>
+        </a:xfrm>
+      </p:grpSpPr>
+      <p:sp>
+        <p:nvSpPr>
+          <p:cNvPr id="2" name="Title 1"/>
+          <p:cNvSpPr>
+            <a:spLocks noGrp="1"/>
+          </p:cNvSpPr>
+          <p:nvPr>
+            <p:ph type="title"/>
+          </p:nvPr>
+        </p:nvSpPr>
+        <p:spPr/>
+        <p:txBody>
+          <a:bodyPr/>
+          <a:lstStyle/>
+          <a:p>
+            <a:r>
               <a:t>Project Isolation</a:t>
             </a:r>
           </a:p>
@@ -28862,7 +29103,7 @@
 </p:sld>
 </file>
 
-<file path=ppt/slides/slide11.xml><?xml version="1.0" encoding="utf-8"?>
+<file path=ppt/slides/slide14.xml><?xml version="1.0" encoding="utf-8"?>
 <p:sld xmlns:a="http://schemas.openxmlformats.org/drawingml/2006/main" xmlns:r="http://schemas.openxmlformats.org/officeDocument/2006/relationships" xmlns:p="http://schemas.openxmlformats.org/presentationml/2006/main">
   <p:cSld>
     <p:spTree>
@@ -28939,7 +29180,7 @@
 </p:sld>
 </file>
 
-<file path=ppt/slides/slide12.xml><?xml version="1.0" encoding="utf-8"?>
+<file path=ppt/slides/slide15.xml><?xml version="1.0" encoding="utf-8"?>
 <p:sld xmlns:a="http://schemas.openxmlformats.org/drawingml/2006/main" xmlns:r="http://schemas.openxmlformats.org/officeDocument/2006/relationships" xmlns:p="http://schemas.openxmlformats.org/presentationml/2006/main">
   <p:cSld>
     <p:spTree>
@@ -29021,7 +29262,7 @@
 </p:sld>
 </file>
 
-<file path=ppt/slides/slide13.xml><?xml version="1.0" encoding="utf-8"?>
+<file path=ppt/slides/slide16.xml><?xml version="1.0" encoding="utf-8"?>
 <p:sld xmlns:a="http://schemas.openxmlformats.org/drawingml/2006/main" xmlns:r="http://schemas.openxmlformats.org/officeDocument/2006/relationships" xmlns:p="http://schemas.openxmlformats.org/presentationml/2006/main">
   <p:cSld>
     <p:spTree>
@@ -29103,7 +29344,7 @@
 </p:sld>
 </file>
 
-<file path=ppt/slides/slide14.xml><?xml version="1.0" encoding="utf-8"?>
+<file path=ppt/slides/slide17.xml><?xml version="1.0" encoding="utf-8"?>
 <p:sld xmlns:a="http://schemas.openxmlformats.org/drawingml/2006/main" xmlns:r="http://schemas.openxmlformats.org/officeDocument/2006/relationships" xmlns:p="http://schemas.openxmlformats.org/presentationml/2006/main">
   <p:cSld>
     <p:spTree>
@@ -29180,7 +29421,7 @@
 </p:sld>
 </file>
 
-<file path=ppt/slides/slide15.xml><?xml version="1.0" encoding="utf-8"?>
+<file path=ppt/slides/slide18.xml><?xml version="1.0" encoding="utf-8"?>
 <p:sld xmlns:a="http://schemas.openxmlformats.org/drawingml/2006/main" xmlns:r="http://schemas.openxmlformats.org/officeDocument/2006/relationships" xmlns:p="http://schemas.openxmlformats.org/presentationml/2006/main">
   <p:cSld>
     <p:spTree>
@@ -29257,7 +29498,7 @@
 </p:sld>
 </file>
 
-<file path=ppt/slides/slide16.xml><?xml version="1.0" encoding="utf-8"?>
+<file path=ppt/slides/slide19.xml><?xml version="1.0" encoding="utf-8"?>
 <p:sld xmlns:a="http://schemas.openxmlformats.org/drawingml/2006/main" xmlns:r="http://schemas.openxmlformats.org/officeDocument/2006/relationships" xmlns:p="http://schemas.openxmlformats.org/presentationml/2006/main">
   <p:cSld>
     <p:spTree>
@@ -29327,237 +29568,6 @@
           <a:p>
             <a:r>
               <a:t>- Optimization strategies</a:t>
-            </a:r>
-          </a:p>
-        </p:txBody>
-      </p:sp>
-    </p:spTree>
-  </p:cSld>
-  <p:clrMapOvr>
-    <a:masterClrMapping/>
-  </p:clrMapOvr>
-</p:sld>
-</file>
-
-<file path=ppt/slides/slide17.xml><?xml version="1.0" encoding="utf-8"?>
-<p:sld xmlns:a="http://schemas.openxmlformats.org/drawingml/2006/main" xmlns:r="http://schemas.openxmlformats.org/officeDocument/2006/relationships" xmlns:p="http://schemas.openxmlformats.org/presentationml/2006/main">
-  <p:cSld>
-    <p:spTree>
-      <p:nvGrpSpPr>
-        <p:cNvPr id="1" name=""/>
-        <p:cNvGrpSpPr/>
-        <p:nvPr/>
-      </p:nvGrpSpPr>
-      <p:grpSpPr>
-        <a:xfrm>
-          <a:off x="0" y="0"/>
-          <a:ext cx="0" cy="0"/>
-          <a:chOff x="0" y="0"/>
-          <a:chExt cx="0" cy="0"/>
-        </a:xfrm>
-      </p:grpSpPr>
-      <p:sp>
-        <p:nvSpPr>
-          <p:cNvPr id="2" name="Title 1"/>
-          <p:cNvSpPr>
-            <a:spLocks noGrp="1"/>
-          </p:cNvSpPr>
-          <p:nvPr>
-            <p:ph type="title"/>
-          </p:nvPr>
-        </p:nvSpPr>
-        <p:spPr/>
-        <p:txBody>
-          <a:bodyPr/>
-          <a:lstStyle/>
-          <a:p>
-            <a:r>
-              <a:t>Cloud Shell &amp; gcloud CLI</a:t>
-            </a:r>
-          </a:p>
-        </p:txBody>
-      </p:sp>
-      <p:sp>
-        <p:nvSpPr>
-          <p:cNvPr id="3" name="Content Placeholder 2"/>
-          <p:cNvSpPr>
-            <a:spLocks noGrp="1"/>
-          </p:cNvSpPr>
-          <p:nvPr>
-            <p:ph idx="1"/>
-          </p:nvPr>
-        </p:nvSpPr>
-        <p:spPr/>
-        <p:txBody>
-          <a:bodyPr/>
-          <a:lstStyle/>
-          <a:p>
-            <a:r>
-              <a:t>- Browser-based terminal</a:t>
-            </a:r>
-          </a:p>
-          <a:p>
-            <a:r>
-              <a:t>- Pre-installed tools</a:t>
-            </a:r>
-          </a:p>
-          <a:p>
-            <a:r>
-              <a:t>- Access to GCP resources</a:t>
-            </a:r>
-          </a:p>
-        </p:txBody>
-      </p:sp>
-    </p:spTree>
-  </p:cSld>
-  <p:clrMapOvr>
-    <a:masterClrMapping/>
-  </p:clrMapOvr>
-</p:sld>
-</file>
-
-<file path=ppt/slides/slide18.xml><?xml version="1.0" encoding="utf-8"?>
-<p:sld xmlns:a="http://schemas.openxmlformats.org/drawingml/2006/main" xmlns:r="http://schemas.openxmlformats.org/officeDocument/2006/relationships" xmlns:p="http://schemas.openxmlformats.org/presentationml/2006/main">
-  <p:cSld>
-    <p:spTree>
-      <p:nvGrpSpPr>
-        <p:cNvPr id="1" name=""/>
-        <p:cNvGrpSpPr/>
-        <p:nvPr/>
-      </p:nvGrpSpPr>
-      <p:grpSpPr>
-        <a:xfrm>
-          <a:off x="0" y="0"/>
-          <a:ext cx="0" cy="0"/>
-          <a:chOff x="0" y="0"/>
-          <a:chExt cx="0" cy="0"/>
-        </a:xfrm>
-      </p:grpSpPr>
-      <p:sp>
-        <p:nvSpPr>
-          <p:cNvPr id="2" name="Title 1"/>
-          <p:cNvSpPr>
-            <a:spLocks noGrp="1"/>
-          </p:cNvSpPr>
-          <p:nvPr>
-            <p:ph type="title"/>
-          </p:nvPr>
-        </p:nvSpPr>
-        <p:spPr/>
-        <p:txBody>
-          <a:bodyPr/>
-          <a:lstStyle/>
-          <a:p>
-            <a:r>
-              <a:t>gcloud Commands</a:t>
-            </a:r>
-          </a:p>
-        </p:txBody>
-      </p:sp>
-      <p:sp>
-        <p:nvSpPr>
-          <p:cNvPr id="3" name="Content Placeholder 2"/>
-          <p:cNvSpPr>
-            <a:spLocks noGrp="1"/>
-          </p:cNvSpPr>
-          <p:nvPr>
-            <p:ph idx="1"/>
-          </p:nvPr>
-        </p:nvSpPr>
-        <p:spPr/>
-        <p:txBody>
-          <a:bodyPr/>
-          <a:lstStyle/>
-          <a:p>
-            <a:r>
-              <a:t>- gcloud init</a:t>
-            </a:r>
-          </a:p>
-          <a:p>
-            <a:r>
-              <a:t>- gcloud compute instances create</a:t>
-            </a:r>
-          </a:p>
-          <a:p>
-            <a:r>
-              <a:t>- gcloud storage buckets create</a:t>
-            </a:r>
-          </a:p>
-        </p:txBody>
-      </p:sp>
-    </p:spTree>
-  </p:cSld>
-  <p:clrMapOvr>
-    <a:masterClrMapping/>
-  </p:clrMapOvr>
-</p:sld>
-</file>
-
-<file path=ppt/slides/slide19.xml><?xml version="1.0" encoding="utf-8"?>
-<p:sld xmlns:a="http://schemas.openxmlformats.org/drawingml/2006/main" xmlns:r="http://schemas.openxmlformats.org/officeDocument/2006/relationships" xmlns:p="http://schemas.openxmlformats.org/presentationml/2006/main">
-  <p:cSld>
-    <p:spTree>
-      <p:nvGrpSpPr>
-        <p:cNvPr id="1" name=""/>
-        <p:cNvGrpSpPr/>
-        <p:nvPr/>
-      </p:nvGrpSpPr>
-      <p:grpSpPr>
-        <a:xfrm>
-          <a:off x="0" y="0"/>
-          <a:ext cx="0" cy="0"/>
-          <a:chOff x="0" y="0"/>
-          <a:chExt cx="0" cy="0"/>
-        </a:xfrm>
-      </p:grpSpPr>
-      <p:sp>
-        <p:nvSpPr>
-          <p:cNvPr id="2" name="Title 1"/>
-          <p:cNvSpPr>
-            <a:spLocks noGrp="1"/>
-          </p:cNvSpPr>
-          <p:nvPr>
-            <p:ph type="title"/>
-          </p:nvPr>
-        </p:nvSpPr>
-        <p:spPr/>
-        <p:txBody>
-          <a:bodyPr/>
-          <a:lstStyle/>
-          <a:p>
-            <a:r>
-              <a:t>Deploy via CLI</a:t>
-            </a:r>
-          </a:p>
-        </p:txBody>
-      </p:sp>
-      <p:sp>
-        <p:nvSpPr>
-          <p:cNvPr id="3" name="Content Placeholder 2"/>
-          <p:cNvSpPr>
-            <a:spLocks noGrp="1"/>
-          </p:cNvSpPr>
-          <p:nvPr>
-            <p:ph idx="1"/>
-          </p:nvPr>
-        </p:nvSpPr>
-        <p:spPr/>
-        <p:txBody>
-          <a:bodyPr/>
-          <a:lstStyle/>
-          <a:p>
-            <a:r>
-              <a:t>- Automate deployments</a:t>
-            </a:r>
-          </a:p>
-          <a:p>
-            <a:r>
-              <a:t>- Script infrastructure</a:t>
-            </a:r>
-          </a:p>
-          <a:p>
-            <a:r>
-              <a:t>- Infrastructure as Code</a:t>
             </a:r>
           </a:p>
         </p:txBody>
@@ -29653,6 +29663,237 @@
 </file>
 
 <file path=ppt/slides/slide20.xml><?xml version="1.0" encoding="utf-8"?>
+<p:sld xmlns:a="http://schemas.openxmlformats.org/drawingml/2006/main" xmlns:r="http://schemas.openxmlformats.org/officeDocument/2006/relationships" xmlns:p="http://schemas.openxmlformats.org/presentationml/2006/main">
+  <p:cSld>
+    <p:spTree>
+      <p:nvGrpSpPr>
+        <p:cNvPr id="1" name=""/>
+        <p:cNvGrpSpPr/>
+        <p:nvPr/>
+      </p:nvGrpSpPr>
+      <p:grpSpPr>
+        <a:xfrm>
+          <a:off x="0" y="0"/>
+          <a:ext cx="0" cy="0"/>
+          <a:chOff x="0" y="0"/>
+          <a:chExt cx="0" cy="0"/>
+        </a:xfrm>
+      </p:grpSpPr>
+      <p:sp>
+        <p:nvSpPr>
+          <p:cNvPr id="2" name="Title 1"/>
+          <p:cNvSpPr>
+            <a:spLocks noGrp="1"/>
+          </p:cNvSpPr>
+          <p:nvPr>
+            <p:ph type="title"/>
+          </p:nvPr>
+        </p:nvSpPr>
+        <p:spPr/>
+        <p:txBody>
+          <a:bodyPr/>
+          <a:lstStyle/>
+          <a:p>
+            <a:r>
+              <a:t>Cloud Shell &amp; gcloud CLI</a:t>
+            </a:r>
+          </a:p>
+        </p:txBody>
+      </p:sp>
+      <p:sp>
+        <p:nvSpPr>
+          <p:cNvPr id="3" name="Content Placeholder 2"/>
+          <p:cNvSpPr>
+            <a:spLocks noGrp="1"/>
+          </p:cNvSpPr>
+          <p:nvPr>
+            <p:ph idx="1"/>
+          </p:nvPr>
+        </p:nvSpPr>
+        <p:spPr/>
+        <p:txBody>
+          <a:bodyPr/>
+          <a:lstStyle/>
+          <a:p>
+            <a:r>
+              <a:t>- Browser-based terminal</a:t>
+            </a:r>
+          </a:p>
+          <a:p>
+            <a:r>
+              <a:t>- Pre-installed tools</a:t>
+            </a:r>
+          </a:p>
+          <a:p>
+            <a:r>
+              <a:t>- Access to GCP resources</a:t>
+            </a:r>
+          </a:p>
+        </p:txBody>
+      </p:sp>
+    </p:spTree>
+  </p:cSld>
+  <p:clrMapOvr>
+    <a:masterClrMapping/>
+  </p:clrMapOvr>
+</p:sld>
+</file>
+
+<file path=ppt/slides/slide21.xml><?xml version="1.0" encoding="utf-8"?>
+<p:sld xmlns:a="http://schemas.openxmlformats.org/drawingml/2006/main" xmlns:r="http://schemas.openxmlformats.org/officeDocument/2006/relationships" xmlns:p="http://schemas.openxmlformats.org/presentationml/2006/main">
+  <p:cSld>
+    <p:spTree>
+      <p:nvGrpSpPr>
+        <p:cNvPr id="1" name=""/>
+        <p:cNvGrpSpPr/>
+        <p:nvPr/>
+      </p:nvGrpSpPr>
+      <p:grpSpPr>
+        <a:xfrm>
+          <a:off x="0" y="0"/>
+          <a:ext cx="0" cy="0"/>
+          <a:chOff x="0" y="0"/>
+          <a:chExt cx="0" cy="0"/>
+        </a:xfrm>
+      </p:grpSpPr>
+      <p:sp>
+        <p:nvSpPr>
+          <p:cNvPr id="2" name="Title 1"/>
+          <p:cNvSpPr>
+            <a:spLocks noGrp="1"/>
+          </p:cNvSpPr>
+          <p:nvPr>
+            <p:ph type="title"/>
+          </p:nvPr>
+        </p:nvSpPr>
+        <p:spPr/>
+        <p:txBody>
+          <a:bodyPr/>
+          <a:lstStyle/>
+          <a:p>
+            <a:r>
+              <a:t>gcloud Commands</a:t>
+            </a:r>
+          </a:p>
+        </p:txBody>
+      </p:sp>
+      <p:sp>
+        <p:nvSpPr>
+          <p:cNvPr id="3" name="Content Placeholder 2"/>
+          <p:cNvSpPr>
+            <a:spLocks noGrp="1"/>
+          </p:cNvSpPr>
+          <p:nvPr>
+            <p:ph idx="1"/>
+          </p:nvPr>
+        </p:nvSpPr>
+        <p:spPr/>
+        <p:txBody>
+          <a:bodyPr/>
+          <a:lstStyle/>
+          <a:p>
+            <a:r>
+              <a:t>- gcloud init</a:t>
+            </a:r>
+          </a:p>
+          <a:p>
+            <a:r>
+              <a:t>- gcloud compute instances create</a:t>
+            </a:r>
+          </a:p>
+          <a:p>
+            <a:r>
+              <a:t>- gcloud storage buckets create</a:t>
+            </a:r>
+          </a:p>
+        </p:txBody>
+      </p:sp>
+    </p:spTree>
+  </p:cSld>
+  <p:clrMapOvr>
+    <a:masterClrMapping/>
+  </p:clrMapOvr>
+</p:sld>
+</file>
+
+<file path=ppt/slides/slide22.xml><?xml version="1.0" encoding="utf-8"?>
+<p:sld xmlns:a="http://schemas.openxmlformats.org/drawingml/2006/main" xmlns:r="http://schemas.openxmlformats.org/officeDocument/2006/relationships" xmlns:p="http://schemas.openxmlformats.org/presentationml/2006/main">
+  <p:cSld>
+    <p:spTree>
+      <p:nvGrpSpPr>
+        <p:cNvPr id="1" name=""/>
+        <p:cNvGrpSpPr/>
+        <p:nvPr/>
+      </p:nvGrpSpPr>
+      <p:grpSpPr>
+        <a:xfrm>
+          <a:off x="0" y="0"/>
+          <a:ext cx="0" cy="0"/>
+          <a:chOff x="0" y="0"/>
+          <a:chExt cx="0" cy="0"/>
+        </a:xfrm>
+      </p:grpSpPr>
+      <p:sp>
+        <p:nvSpPr>
+          <p:cNvPr id="2" name="Title 1"/>
+          <p:cNvSpPr>
+            <a:spLocks noGrp="1"/>
+          </p:cNvSpPr>
+          <p:nvPr>
+            <p:ph type="title"/>
+          </p:nvPr>
+        </p:nvSpPr>
+        <p:spPr/>
+        <p:txBody>
+          <a:bodyPr/>
+          <a:lstStyle/>
+          <a:p>
+            <a:r>
+              <a:t>Deploy via CLI</a:t>
+            </a:r>
+          </a:p>
+        </p:txBody>
+      </p:sp>
+      <p:sp>
+        <p:nvSpPr>
+          <p:cNvPr id="3" name="Content Placeholder 2"/>
+          <p:cNvSpPr>
+            <a:spLocks noGrp="1"/>
+          </p:cNvSpPr>
+          <p:nvPr>
+            <p:ph idx="1"/>
+          </p:nvPr>
+        </p:nvSpPr>
+        <p:spPr/>
+        <p:txBody>
+          <a:bodyPr/>
+          <a:lstStyle/>
+          <a:p>
+            <a:r>
+              <a:t>- Automate deployments</a:t>
+            </a:r>
+          </a:p>
+          <a:p>
+            <a:r>
+              <a:t>- Script infrastructure</a:t>
+            </a:r>
+          </a:p>
+          <a:p>
+            <a:r>
+              <a:t>- Infrastructure as Code</a:t>
+            </a:r>
+          </a:p>
+        </p:txBody>
+      </p:sp>
+    </p:spTree>
+  </p:cSld>
+  <p:clrMapOvr>
+    <a:masterClrMapping/>
+  </p:clrMapOvr>
+</p:sld>
+</file>
+
+<file path=ppt/slides/slide23.xml><?xml version="1.0" encoding="utf-8"?>
 <p:sld xmlns:a="http://schemas.openxmlformats.org/drawingml/2006/main" xmlns:r="http://schemas.openxmlformats.org/officeDocument/2006/relationships" xmlns:p="http://schemas.openxmlformats.org/presentationml/2006/main">
   <p:cSld>
     <p:bg>
@@ -38843,7 +39084,7 @@
 </p:sld>
 </file>
 
-<file path=ppt/slides/slide21.xml><?xml version="1.0" encoding="utf-8"?>
+<file path=ppt/slides/slide24.xml><?xml version="1.0" encoding="utf-8"?>
 <p:sld xmlns:a="http://schemas.openxmlformats.org/drawingml/2006/main" xmlns:r="http://schemas.openxmlformats.org/officeDocument/2006/relationships" xmlns:p="http://schemas.openxmlformats.org/presentationml/2006/main">
   <p:cSld>
     <p:spTree>
@@ -38920,7 +39161,7 @@
 </p:sld>
 </file>
 
-<file path=ppt/slides/slide22.xml><?xml version="1.0" encoding="utf-8"?>
+<file path=ppt/slides/slide25.xml><?xml version="1.0" encoding="utf-8"?>
 <p:sld xmlns:a="http://schemas.openxmlformats.org/drawingml/2006/main" xmlns:r="http://schemas.openxmlformats.org/officeDocument/2006/relationships" xmlns:p="http://schemas.openxmlformats.org/presentationml/2006/main">
   <p:cSld>
     <p:spTree>
@@ -38997,7 +39238,7 @@
 </p:sld>
 </file>
 
-<file path=ppt/slides/slide23.xml><?xml version="1.0" encoding="utf-8"?>
+<file path=ppt/slides/slide26.xml><?xml version="1.0" encoding="utf-8"?>
 <p:sld xmlns:a="http://schemas.openxmlformats.org/drawingml/2006/main" xmlns:r="http://schemas.openxmlformats.org/officeDocument/2006/relationships" xmlns:p="http://schemas.openxmlformats.org/presentationml/2006/main">
   <p:cSld>
     <p:spTree>
@@ -39084,7 +39325,7 @@
 </p:sld>
 </file>
 
-<file path=ppt/slides/slide24.xml><?xml version="1.0" encoding="utf-8"?>
+<file path=ppt/slides/slide27.xml><?xml version="1.0" encoding="utf-8"?>
 <p:sld xmlns:a="http://schemas.openxmlformats.org/drawingml/2006/main" xmlns:r="http://schemas.openxmlformats.org/officeDocument/2006/relationships" xmlns:p="http://schemas.openxmlformats.org/presentationml/2006/main">
   <p:cSld>
     <p:spTree>
@@ -39161,7 +39402,7 @@
 </p:sld>
 </file>
 
-<file path=ppt/slides/slide25.xml><?xml version="1.0" encoding="utf-8"?>
+<file path=ppt/slides/slide28.xml><?xml version="1.0" encoding="utf-8"?>
 <p:sld xmlns:a="http://schemas.openxmlformats.org/drawingml/2006/main" xmlns:r="http://schemas.openxmlformats.org/officeDocument/2006/relationships" xmlns:p="http://schemas.openxmlformats.org/presentationml/2006/main">
   <p:cSld>
     <p:spTree>
@@ -39238,7 +39479,7 @@
 </p:sld>
 </file>
 
-<file path=ppt/slides/slide26.xml><?xml version="1.0" encoding="utf-8"?>
+<file path=ppt/slides/slide29.xml><?xml version="1.0" encoding="utf-8"?>
 <p:sld xmlns:a="http://schemas.openxmlformats.org/drawingml/2006/main" xmlns:r="http://schemas.openxmlformats.org/officeDocument/2006/relationships" xmlns:p="http://schemas.openxmlformats.org/presentationml/2006/main">
   <p:cSld>
     <p:spTree>
@@ -39315,7 +39556,89 @@
 </p:sld>
 </file>
 
-<file path=ppt/slides/slide27.xml><?xml version="1.0" encoding="utf-8"?>
+<file path=ppt/slides/slide3.xml><?xml version="1.0" encoding="utf-8"?>
+<p:sld xmlns:a="http://schemas.openxmlformats.org/drawingml/2006/main" xmlns:r="http://schemas.openxmlformats.org/officeDocument/2006/relationships" xmlns:p="http://schemas.openxmlformats.org/presentationml/2006/main">
+  <p:cSld>
+    <p:spTree>
+      <p:nvGrpSpPr>
+        <p:cNvPr id="1" name=""/>
+        <p:cNvGrpSpPr/>
+        <p:nvPr/>
+      </p:nvGrpSpPr>
+      <p:grpSpPr>
+        <a:xfrm>
+          <a:off x="0" y="0"/>
+          <a:ext cx="0" cy="0"/>
+          <a:chOff x="0" y="0"/>
+          <a:chExt cx="0" cy="0"/>
+        </a:xfrm>
+      </p:grpSpPr>
+      <p:sp>
+        <p:nvSpPr>
+          <p:cNvPr id="2" name="Title 1"/>
+          <p:cNvSpPr>
+            <a:spLocks noGrp="1"/>
+          </p:cNvSpPr>
+          <p:nvPr>
+            <p:ph type="title"/>
+          </p:nvPr>
+        </p:nvSpPr>
+        <p:spPr/>
+        <p:txBody>
+          <a:bodyPr/>
+          <a:lstStyle/>
+          <a:p>
+            <a:r>
+              <a:t>GCP Global Infrastructure</a:t>
+            </a:r>
+          </a:p>
+        </p:txBody>
+      </p:sp>
+      <p:sp>
+        <p:nvSpPr>
+          <p:cNvPr id="3" name="Content Placeholder 2"/>
+          <p:cNvSpPr>
+            <a:spLocks noGrp="1"/>
+          </p:cNvSpPr>
+          <p:nvPr>
+            <p:ph idx="1"/>
+          </p:nvPr>
+        </p:nvSpPr>
+        <p:spPr/>
+        <p:txBody>
+          <a:bodyPr/>
+          <a:lstStyle/>
+          <a:p>
+            <a:r>
+              <a:t>- Regions &amp; Zones</a:t>
+            </a:r>
+          </a:p>
+          <a:p>
+            <a:r>
+              <a:t>- Multi-region deployments</a:t>
+            </a:r>
+          </a:p>
+          <a:p>
+            <a:r>
+              <a:t>- High availability design</a:t>
+            </a:r>
+          </a:p>
+          <a:p>
+            <a:r>
+              <a:t>- Low latency networking</a:t>
+            </a:r>
+          </a:p>
+        </p:txBody>
+      </p:sp>
+    </p:spTree>
+  </p:cSld>
+  <p:clrMapOvr>
+    <a:masterClrMapping/>
+  </p:clrMapOvr>
+</p:sld>
+</file>
+
+<file path=ppt/slides/slide30.xml><?xml version="1.0" encoding="utf-8"?>
 <p:sld xmlns:a="http://schemas.openxmlformats.org/drawingml/2006/main" xmlns:r="http://schemas.openxmlformats.org/officeDocument/2006/relationships" xmlns:p="http://schemas.openxmlformats.org/presentationml/2006/main">
   <p:cSld>
     <p:bg>
@@ -39475,7 +39798,7 @@
 </p:sld>
 </file>
 
-<file path=ppt/slides/slide3.xml><?xml version="1.0" encoding="utf-8"?>
+<file path=ppt/slides/slide4.xml><?xml version="1.0" encoding="utf-8"?>
 <p:sld xmlns:a="http://schemas.openxmlformats.org/drawingml/2006/main" xmlns:r="http://schemas.openxmlformats.org/officeDocument/2006/relationships" xmlns:p="http://schemas.openxmlformats.org/presentationml/2006/main">
   <p:cSld>
     <p:spTree>
@@ -39494,7 +39817,13 @@
       </p:grpSpPr>
       <p:sp>
         <p:nvSpPr>
-          <p:cNvPr id="2" name="Title 1"/>
+          <p:cNvPr id="2" name="Title 1">
+            <a:extLst>
+              <a:ext uri="{FF2B5EF4-FFF2-40B4-BE49-F238E27FC236}">
+                <a16:creationId xmlns:a16="http://schemas.microsoft.com/office/drawing/2014/main" id="{60CBE5EE-4F68-B9FE-AB0D-0E0037B35C95}"/>
+              </a:ext>
+            </a:extLst>
+          </p:cNvPr>
           <p:cNvSpPr>
             <a:spLocks noGrp="1"/>
           </p:cNvSpPr>
@@ -39508,19 +39837,157 @@
           <a:lstStyle/>
           <a:p>
             <a:r>
-              <a:t>GCP Global Infrastructure</a:t>
+              <a:rPr lang="en-IN" dirty="0"/>
+              <a:t>Regions &amp; Zones</a:t>
             </a:r>
           </a:p>
         </p:txBody>
       </p:sp>
       <p:sp>
         <p:nvSpPr>
-          <p:cNvPr id="3" name="Content Placeholder 2"/>
+          <p:cNvPr id="3" name="Content Placeholder 2">
+            <a:extLst>
+              <a:ext uri="{FF2B5EF4-FFF2-40B4-BE49-F238E27FC236}">
+                <a16:creationId xmlns:a16="http://schemas.microsoft.com/office/drawing/2014/main" id="{B9D8DCA6-6B5A-27E3-7858-FEA3FD750EA5}"/>
+              </a:ext>
+            </a:extLst>
+          </p:cNvPr>
           <p:cNvSpPr>
             <a:spLocks noGrp="1"/>
           </p:cNvSpPr>
           <p:nvPr>
             <p:ph idx="1"/>
+          </p:nvPr>
+        </p:nvSpPr>
+        <p:spPr>
+          <a:xfrm>
+            <a:off x="768096" y="1905000"/>
+            <a:ext cx="7290055" cy="4404360"/>
+          </a:xfrm>
+        </p:spPr>
+        <p:txBody>
+          <a:bodyPr>
+            <a:normAutofit fontScale="92500" lnSpcReduction="20000"/>
+          </a:bodyPr>
+          <a:lstStyle/>
+          <a:p>
+            <a:pPr marL="0" indent="0">
+              <a:buNone/>
+            </a:pPr>
+            <a:endParaRPr lang="en-US" b="1" dirty="0"/>
+          </a:p>
+          <a:p>
+            <a:r>
+              <a:rPr lang="en-US" b="1" dirty="0"/>
+              <a:t>What is a Region?</a:t>
+            </a:r>
+            <a:endParaRPr lang="en-US" dirty="0"/>
+          </a:p>
+          <a:p>
+            <a:r>
+              <a:rPr lang="en-US" dirty="0"/>
+              <a:t>A geographic area containing multiple data centers </a:t>
+            </a:r>
+          </a:p>
+          <a:p>
+            <a:r>
+              <a:rPr lang="en-US" dirty="0"/>
+              <a:t>Examples: East US, West Europe, Central India </a:t>
+            </a:r>
+          </a:p>
+          <a:p>
+            <a:r>
+              <a:rPr lang="en-US" b="1" dirty="0"/>
+              <a:t>What is an Availability Zone?</a:t>
+            </a:r>
+            <a:endParaRPr lang="en-US" dirty="0"/>
+          </a:p>
+          <a:p>
+            <a:r>
+              <a:rPr lang="en-US" dirty="0"/>
+              <a:t>Isolated data center within a region </a:t>
+            </a:r>
+          </a:p>
+          <a:p>
+            <a:r>
+              <a:rPr lang="en-US" dirty="0"/>
+              <a:t>Independent power, cooling, networking </a:t>
+            </a:r>
+          </a:p>
+          <a:p>
+            <a:r>
+              <a:rPr lang="en-US" b="1" dirty="0"/>
+              <a:t>Key Benefits</a:t>
+            </a:r>
+            <a:endParaRPr lang="en-US" dirty="0"/>
+          </a:p>
+          <a:p>
+            <a:r>
+              <a:rPr lang="en-US" dirty="0"/>
+              <a:t>Fault isolation </a:t>
+            </a:r>
+          </a:p>
+          <a:p>
+            <a:r>
+              <a:rPr lang="en-US" dirty="0"/>
+              <a:t>Disaster resilience </a:t>
+            </a:r>
+          </a:p>
+          <a:p>
+            <a:r>
+              <a:rPr lang="en-US" dirty="0"/>
+              <a:t>Improved uptime</a:t>
+            </a:r>
+          </a:p>
+          <a:p>
+            <a:endParaRPr lang="en-IN" dirty="0"/>
+          </a:p>
+        </p:txBody>
+      </p:sp>
+    </p:spTree>
+    <p:extLst>
+      <p:ext uri="{BB962C8B-B14F-4D97-AF65-F5344CB8AC3E}">
+        <p14:creationId xmlns:p14="http://schemas.microsoft.com/office/powerpoint/2010/main" val="2326179073"/>
+      </p:ext>
+    </p:extLst>
+  </p:cSld>
+  <p:clrMapOvr>
+    <a:masterClrMapping/>
+  </p:clrMapOvr>
+</p:sld>
+</file>
+
+<file path=ppt/slides/slide5.xml><?xml version="1.0" encoding="utf-8"?>
+<p:sld xmlns:a="http://schemas.openxmlformats.org/drawingml/2006/main" xmlns:r="http://schemas.openxmlformats.org/officeDocument/2006/relationships" xmlns:p="http://schemas.openxmlformats.org/presentationml/2006/main">
+  <p:cSld>
+    <p:spTree>
+      <p:nvGrpSpPr>
+        <p:cNvPr id="1" name=""/>
+        <p:cNvGrpSpPr/>
+        <p:nvPr/>
+      </p:nvGrpSpPr>
+      <p:grpSpPr>
+        <a:xfrm>
+          <a:off x="0" y="0"/>
+          <a:ext cx="0" cy="0"/>
+          <a:chOff x="0" y="0"/>
+          <a:chExt cx="0" cy="0"/>
+        </a:xfrm>
+      </p:grpSpPr>
+      <p:sp>
+        <p:nvSpPr>
+          <p:cNvPr id="2" name="Title 1">
+            <a:extLst>
+              <a:ext uri="{FF2B5EF4-FFF2-40B4-BE49-F238E27FC236}">
+                <a16:creationId xmlns:a16="http://schemas.microsoft.com/office/drawing/2014/main" id="{092D2BEC-254F-7AF8-0F63-921A2234FAAC}"/>
+              </a:ext>
+            </a:extLst>
+          </p:cNvPr>
+          <p:cNvSpPr>
+            <a:spLocks noGrp="1"/>
+          </p:cNvSpPr>
+          <p:nvPr>
+            <p:ph type="title"/>
           </p:nvPr>
         </p:nvSpPr>
         <p:spPr/>
@@ -39529,27 +39996,161 @@
           <a:lstStyle/>
           <a:p>
             <a:r>
-              <a:t>- Regions &amp; Zones</a:t>
+              <a:rPr lang="en-US" b="1" dirty="0"/>
+              <a:t>Multi-Region Deployments</a:t>
+            </a:r>
+            <a:endParaRPr lang="en-IN" dirty="0"/>
+          </a:p>
+        </p:txBody>
+      </p:sp>
+      <p:sp>
+        <p:nvSpPr>
+          <p:cNvPr id="3" name="Content Placeholder 2">
+            <a:extLst>
+              <a:ext uri="{FF2B5EF4-FFF2-40B4-BE49-F238E27FC236}">
+                <a16:creationId xmlns:a16="http://schemas.microsoft.com/office/drawing/2014/main" id="{069D2A23-B3A5-6382-5344-9496575C6BCE}"/>
+              </a:ext>
+            </a:extLst>
+          </p:cNvPr>
+          <p:cNvSpPr>
+            <a:spLocks noGrp="1"/>
+          </p:cNvSpPr>
+          <p:nvPr>
+            <p:ph idx="1"/>
+          </p:nvPr>
+        </p:nvSpPr>
+        <p:spPr>
+          <a:xfrm>
+            <a:off x="768096" y="2162175"/>
+            <a:ext cx="7290055" cy="4147185"/>
+          </a:xfrm>
+        </p:spPr>
+        <p:txBody>
+          <a:bodyPr>
+            <a:normAutofit lnSpcReduction="10000"/>
+          </a:bodyPr>
+          <a:lstStyle/>
+          <a:p>
+            <a:pPr marL="0" indent="0">
+              <a:buNone/>
+            </a:pPr>
+            <a:r>
+              <a:rPr lang="en-US" dirty="0"/>
+              <a:t>Deploying applications across multiple regions </a:t>
             </a:r>
           </a:p>
           <a:p>
             <a:r>
-              <a:t>- Multi-region deployments</a:t>
+              <a:rPr lang="en-US" b="1" dirty="0"/>
+              <a:t>Types</a:t>
+            </a:r>
+            <a:endParaRPr lang="en-US" dirty="0"/>
+          </a:p>
+          <a:p>
+            <a:pPr lvl="1"/>
+            <a:r>
+              <a:rPr lang="en-US" dirty="0"/>
+              <a:t>Active-Active -</a:t>
+            </a:r>
+            <a:r>
+              <a:rPr lang="en-US" b="1" dirty="0"/>
+              <a:t> Both are live and serving traffic simultaneously</a:t>
+            </a:r>
+            <a:r>
+              <a:rPr lang="en-US" dirty="0"/>
+              <a:t>.</a:t>
+            </a:r>
+          </a:p>
+          <a:p>
+            <a:pPr lvl="1"/>
+            <a:r>
+              <a:rPr lang="en-US" dirty="0"/>
+              <a:t>Active-Passive - One region is </a:t>
+            </a:r>
+            <a:r>
+              <a:rPr lang="en-US" b="1" dirty="0"/>
+              <a:t>active (serving traffic)</a:t>
+            </a:r>
+            <a:r>
+              <a:rPr lang="en-US" dirty="0"/>
+              <a:t>, the other is </a:t>
+            </a:r>
+            <a:r>
+              <a:rPr lang="en-US" b="1" dirty="0"/>
+              <a:t>standby (idle or minimal activity)</a:t>
+            </a:r>
+            <a:r>
+              <a:rPr lang="en-US" dirty="0"/>
+              <a:t>.</a:t>
             </a:r>
           </a:p>
           <a:p>
             <a:r>
-              <a:t>- High availability design</a:t>
+              <a:rPr lang="en-US" b="1" dirty="0"/>
+              <a:t>Benefits</a:t>
+            </a:r>
+            <a:endParaRPr lang="en-US" dirty="0"/>
+          </a:p>
+          <a:p>
+            <a:pPr lvl="1"/>
+            <a:r>
+              <a:rPr lang="en-US" dirty="0"/>
+              <a:t>Disaster recovery </a:t>
+            </a:r>
+          </a:p>
+          <a:p>
+            <a:pPr lvl="1"/>
+            <a:r>
+              <a:rPr lang="en-US" dirty="0"/>
+              <a:t>Global availability </a:t>
+            </a:r>
+          </a:p>
+          <a:p>
+            <a:pPr lvl="1"/>
+            <a:r>
+              <a:rPr lang="en-US" dirty="0"/>
+              <a:t>Load distribution </a:t>
             </a:r>
           </a:p>
           <a:p>
             <a:r>
-              <a:t>- Low latency networking</a:t>
+              <a:rPr lang="en-US" b="1" dirty="0"/>
+              <a:t>Challenges</a:t>
             </a:r>
+            <a:endParaRPr lang="en-US" dirty="0"/>
+          </a:p>
+          <a:p>
+            <a:pPr lvl="1"/>
+            <a:r>
+              <a:rPr lang="en-US" dirty="0"/>
+              <a:t>Data consistency </a:t>
+            </a:r>
+          </a:p>
+          <a:p>
+            <a:pPr lvl="1"/>
+            <a:r>
+              <a:rPr lang="en-US" dirty="0"/>
+              <a:t>Higher cost </a:t>
+            </a:r>
+          </a:p>
+          <a:p>
+            <a:pPr lvl="1"/>
+            <a:r>
+              <a:rPr lang="en-US" dirty="0"/>
+              <a:t>Complex architecture</a:t>
+            </a:r>
+          </a:p>
+          <a:p>
+            <a:endParaRPr lang="en-IN" dirty="0"/>
           </a:p>
         </p:txBody>
       </p:sp>
     </p:spTree>
+    <p:extLst>
+      <p:ext uri="{BB962C8B-B14F-4D97-AF65-F5344CB8AC3E}">
+        <p14:creationId xmlns:p14="http://schemas.microsoft.com/office/powerpoint/2010/main" val="3915659733"/>
+      </p:ext>
+    </p:extLst>
   </p:cSld>
   <p:clrMapOvr>
     <a:masterClrMapping/>
@@ -39557,7 +40158,7 @@
 </p:sld>
 </file>
 
-<file path=ppt/slides/slide4.xml><?xml version="1.0" encoding="utf-8"?>
+<file path=ppt/slides/slide6.xml><?xml version="1.0" encoding="utf-8"?>
 <p:sld xmlns:a="http://schemas.openxmlformats.org/drawingml/2006/main" xmlns:r="http://schemas.openxmlformats.org/officeDocument/2006/relationships" xmlns:p="http://schemas.openxmlformats.org/presentationml/2006/main">
   <p:cSld>
     <p:spTree>
@@ -39639,7 +40240,7 @@
 </p:sld>
 </file>
 
-<file path=ppt/slides/slide5.xml><?xml version="1.0" encoding="utf-8"?>
+<file path=ppt/slides/slide7.xml><?xml version="1.0" encoding="utf-8"?>
 <p:sld xmlns:a="http://schemas.openxmlformats.org/drawingml/2006/main" xmlns:r="http://schemas.openxmlformats.org/officeDocument/2006/relationships" xmlns:p="http://schemas.openxmlformats.org/presentationml/2006/main">
   <p:cSld>
     <p:spTree>
@@ -39716,7 +40317,7 @@
 </p:sld>
 </file>
 
-<file path=ppt/slides/slide6.xml><?xml version="1.0" encoding="utf-8"?>
+<file path=ppt/slides/slide8.xml><?xml version="1.0" encoding="utf-8"?>
 <p:sld xmlns:a="http://schemas.openxmlformats.org/drawingml/2006/main" xmlns:r="http://schemas.openxmlformats.org/officeDocument/2006/relationships" xmlns:p="http://schemas.openxmlformats.org/presentationml/2006/main">
   <p:cSld>
     <p:spTree>
@@ -39770,21 +40371,25 @@
           <a:lstStyle/>
           <a:p>
             <a:r>
+              <a:rPr dirty="0"/>
               <a:t>- Users</a:t>
             </a:r>
           </a:p>
           <a:p>
             <a:r>
+              <a:rPr dirty="0"/>
               <a:t>- Roles (Primitive, Predefined, Custom)</a:t>
             </a:r>
           </a:p>
           <a:p>
             <a:r>
+              <a:rPr dirty="0"/>
               <a:t>- Service Accounts</a:t>
             </a:r>
           </a:p>
           <a:p>
             <a:r>
+              <a:rPr dirty="0"/>
               <a:t>- Permissions</a:t>
             </a:r>
           </a:p>
@@ -39798,7 +40403,7 @@
 </p:sld>
 </file>
 
-<file path=ppt/slides/slide7.xml><?xml version="1.0" encoding="utf-8"?>
+<file path=ppt/slides/slide9.xml><?xml version="1.0" encoding="utf-8"?>
 <p:sld xmlns:a="http://schemas.openxmlformats.org/drawingml/2006/main" xmlns:r="http://schemas.openxmlformats.org/officeDocument/2006/relationships" xmlns:p="http://schemas.openxmlformats.org/presentationml/2006/main">
   <p:cSld>
     <p:spTree>
@@ -39863,165 +40468,6 @@
           <a:p>
             <a:r>
               <a:t>- Regular access review</a:t>
-            </a:r>
-          </a:p>
-        </p:txBody>
-      </p:sp>
-    </p:spTree>
-  </p:cSld>
-  <p:clrMapOvr>
-    <a:masterClrMapping/>
-  </p:clrMapOvr>
-</p:sld>
-</file>
-
-<file path=ppt/slides/slide8.xml><?xml version="1.0" encoding="utf-8"?>
-<p:sld xmlns:a="http://schemas.openxmlformats.org/drawingml/2006/main" xmlns:r="http://schemas.openxmlformats.org/officeDocument/2006/relationships" xmlns:p="http://schemas.openxmlformats.org/presentationml/2006/main">
-  <p:cSld>
-    <p:spTree>
-      <p:nvGrpSpPr>
-        <p:cNvPr id="1" name=""/>
-        <p:cNvGrpSpPr/>
-        <p:nvPr/>
-      </p:nvGrpSpPr>
-      <p:grpSpPr>
-        <a:xfrm>
-          <a:off x="0" y="0"/>
-          <a:ext cx="0" cy="0"/>
-          <a:chOff x="0" y="0"/>
-          <a:chExt cx="0" cy="0"/>
-        </a:xfrm>
-      </p:grpSpPr>
-      <p:sp>
-        <p:nvSpPr>
-          <p:cNvPr id="2" name="Title 1"/>
-          <p:cNvSpPr>
-            <a:spLocks noGrp="1"/>
-          </p:cNvSpPr>
-          <p:nvPr>
-            <p:ph type="title"/>
-          </p:nvPr>
-        </p:nvSpPr>
-        <p:spPr/>
-        <p:txBody>
-          <a:bodyPr/>
-          <a:lstStyle/>
-          <a:p>
-            <a:r>
-              <a:t>IAM Hierarchy</a:t>
-            </a:r>
-          </a:p>
-        </p:txBody>
-      </p:sp>
-      <p:sp>
-        <p:nvSpPr>
-          <p:cNvPr id="3" name="Content Placeholder 2"/>
-          <p:cNvSpPr>
-            <a:spLocks noGrp="1"/>
-          </p:cNvSpPr>
-          <p:nvPr>
-            <p:ph idx="1"/>
-          </p:nvPr>
-        </p:nvSpPr>
-        <p:spPr/>
-        <p:txBody>
-          <a:bodyPr/>
-          <a:lstStyle/>
-          <a:p>
-            <a:r>
-              <a:t>- Organization level</a:t>
-            </a:r>
-          </a:p>
-          <a:p>
-            <a:r>
-              <a:t>- Folder level</a:t>
-            </a:r>
-          </a:p>
-          <a:p>
-            <a:r>
-              <a:t>- Project level</a:t>
-            </a:r>
-          </a:p>
-          <a:p>
-            <a:r>
-              <a:t>- Inheritance of permissions</a:t>
-            </a:r>
-          </a:p>
-        </p:txBody>
-      </p:sp>
-    </p:spTree>
-  </p:cSld>
-  <p:clrMapOvr>
-    <a:masterClrMapping/>
-  </p:clrMapOvr>
-</p:sld>
-</file>
-
-<file path=ppt/slides/slide9.xml><?xml version="1.0" encoding="utf-8"?>
-<p:sld xmlns:a="http://schemas.openxmlformats.org/drawingml/2006/main" xmlns:r="http://schemas.openxmlformats.org/officeDocument/2006/relationships" xmlns:p="http://schemas.openxmlformats.org/presentationml/2006/main">
-  <p:cSld>
-    <p:spTree>
-      <p:nvGrpSpPr>
-        <p:cNvPr id="1" name=""/>
-        <p:cNvGrpSpPr/>
-        <p:nvPr/>
-      </p:nvGrpSpPr>
-      <p:grpSpPr>
-        <a:xfrm>
-          <a:off x="0" y="0"/>
-          <a:ext cx="0" cy="0"/>
-          <a:chOff x="0" y="0"/>
-          <a:chExt cx="0" cy="0"/>
-        </a:xfrm>
-      </p:grpSpPr>
-      <p:sp>
-        <p:nvSpPr>
-          <p:cNvPr id="2" name="Title 1"/>
-          <p:cNvSpPr>
-            <a:spLocks noGrp="1"/>
-          </p:cNvSpPr>
-          <p:nvPr>
-            <p:ph type="title"/>
-          </p:nvPr>
-        </p:nvSpPr>
-        <p:spPr/>
-        <p:txBody>
-          <a:bodyPr/>
-          <a:lstStyle/>
-          <a:p>
-            <a:r>
-              <a:t>GCP Resource Hierarchy</a:t>
-            </a:r>
-          </a:p>
-        </p:txBody>
-      </p:sp>
-      <p:sp>
-        <p:nvSpPr>
-          <p:cNvPr id="3" name="Content Placeholder 2"/>
-          <p:cNvSpPr>
-            <a:spLocks noGrp="1"/>
-          </p:cNvSpPr>
-          <p:nvPr>
-            <p:ph idx="1"/>
-          </p:nvPr>
-        </p:nvSpPr>
-        <p:spPr/>
-        <p:txBody>
-          <a:bodyPr/>
-          <a:lstStyle/>
-          <a:p>
-            <a:r>
-              <a:t>- Organization → Folder → Project</a:t>
-            </a:r>
-          </a:p>
-          <a:p>
-            <a:r>
-              <a:t>- Logical grouping</a:t>
-            </a:r>
-          </a:p>
-          <a:p>
-            <a:r>
-              <a:t>- Policy inheritance</a:t>
             </a:r>
           </a:p>
         </p:txBody>
